--- a/apisiz/raporlar/2026-10-18-rakip-taramasi/sunum/3-strateji-analisti.pptx
+++ b/apisiz/raporlar/2026-10-18-rakip-taramasi/sunum/3-strateji-analisti.pptx
@@ -3209,7 +3209,7 @@
                   <a:srgbClr val="8A6514"/>
                 </a:solidFill>
               </a:rPr>
-              <a:t>B O L B É</a:t>
+              <a:t>M O T İ F</a:t>
             </a:r>
           </a:p>
         </p:txBody>
@@ -3468,7 +3468,7 @@
                   <a:srgbClr val="5F5C6D"/>
                 </a:solidFill>
               </a:rPr>
-              <a:t>BOLBÉ · 3 · Strateji Analisti · Haftalık Rakip Taraması</a:t>
+              <a:t>MOTİF · 3 · Strateji Analisti · Haftalık Rakip Taraması</a:t>
             </a:r>
           </a:p>
         </p:txBody>
@@ -3927,7 +3927,7 @@
                   <a:srgbClr val="5F5C6D"/>
                 </a:solidFill>
               </a:rPr>
-              <a:t>BOLBÉ · 3 · Strateji Analisti · Haftalık Rakip Taraması</a:t>
+              <a:t>MOTİF · 3 · Strateji Analisti · Haftalık Rakip Taraması</a:t>
             </a:r>
           </a:p>
         </p:txBody>
@@ -4262,7 +4262,7 @@
                   <a:srgbClr val="5F5C6D"/>
                 </a:solidFill>
               </a:rPr>
-              <a:t>BOLBÉ · 3 · Strateji Analisti · Haftalık Rakip Taraması</a:t>
+              <a:t>MOTİF · 3 · Strateji Analisti · Haftalık Rakip Taraması</a:t>
             </a:r>
           </a:p>
         </p:txBody>
@@ -4567,7 +4567,7 @@
                   <a:srgbClr val="5F5C6D"/>
                 </a:solidFill>
               </a:rPr>
-              <a:t>BOLBÉ · 3 · Strateji Analisti · Haftalık Rakip Taraması</a:t>
+              <a:t>MOTİF · 3 · Strateji Analisti · Haftalık Rakip Taraması</a:t>
             </a:r>
           </a:p>
         </p:txBody>
@@ -4872,7 +4872,7 @@
                   <a:srgbClr val="5F5C6D"/>
                 </a:solidFill>
               </a:rPr>
-              <a:t>BOLBÉ · 3 · Strateji Analisti · Haftalık Rakip Taraması</a:t>
+              <a:t>MOTİF · 3 · Strateji Analisti · Haftalık Rakip Taraması</a:t>
             </a:r>
           </a:p>
         </p:txBody>
@@ -5219,7 +5219,7 @@
                   <a:srgbClr val="5F5C6D"/>
                 </a:solidFill>
               </a:rPr>
-              <a:t>BOLBÉ · 3 · Strateji Analisti · Haftalık Rakip Taraması</a:t>
+              <a:t>MOTİF · 3 · Strateji Analisti · Haftalık Rakip Taraması</a:t>
             </a:r>
           </a:p>
         </p:txBody>
@@ -5437,7 +5437,7 @@
                   <a:srgbClr val="5F5C6D"/>
                 </a:solidFill>
               </a:rPr>
-              <a:t>BOLBÉ · 3 · Strateji Analisti · Haftalık Rakip Taraması</a:t>
+              <a:t>MOTİF · 3 · Strateji Analisti · Haftalık Rakip Taraması</a:t>
             </a:r>
           </a:p>
         </p:txBody>
